--- a/TravioDocuments/Ppt.pptx
+++ b/TravioDocuments/Ppt.pptx
@@ -5,7 +5,7 @@
     <p:sldMasterId id="2147484230" r:id="rId1"/>
   </p:sldMasterIdLst>
   <p:notesMasterIdLst>
-    <p:notesMasterId r:id="rId15"/>
+    <p:notesMasterId r:id="rId17"/>
   </p:notesMasterIdLst>
   <p:sldIdLst>
     <p:sldId id="483" r:id="rId2"/>
@@ -18,9 +18,11 @@
     <p:sldId id="486" r:id="rId9"/>
     <p:sldId id="489" r:id="rId10"/>
     <p:sldId id="485" r:id="rId11"/>
-    <p:sldId id="487" r:id="rId12"/>
-    <p:sldId id="473" r:id="rId13"/>
-    <p:sldId id="468" r:id="rId14"/>
+    <p:sldId id="492" r:id="rId12"/>
+    <p:sldId id="491" r:id="rId13"/>
+    <p:sldId id="487" r:id="rId14"/>
+    <p:sldId id="473" r:id="rId15"/>
+    <p:sldId id="468" r:id="rId16"/>
   </p:sldIdLst>
   <p:sldSz cx="12192000" cy="6858000"/>
   <p:notesSz cx="6954838" cy="9309100"/>
@@ -171,9 +173,100 @@
 <file path=ppt/revisionInfo.xml><?xml version="1.0" encoding="utf-8"?>
 <p1510:revInfo xmlns:a="http://schemas.openxmlformats.org/drawingml/2006/main" xmlns:r="http://schemas.openxmlformats.org/officeDocument/2006/relationships" xmlns:p1510="http://schemas.microsoft.com/office/powerpoint/2015/10/main">
   <p1510:revLst>
-    <p1510:client id="{A70EA34E-607E-48CC-B13E-2DD79C2049EF}" v="138" dt="2026-08-07T16:50:45.409"/>
+    <p1510:client id="{A70EA34E-607E-48CC-B13E-2DD79C2049EF}" v="144" dt="2026-08-07T18:20:03.402"/>
   </p1510:revLst>
 </p1510:revInfo>
+</file>
+
+<file path=ppt/changesInfos/changesInfo1.xml><?xml version="1.0" encoding="utf-8"?>
+<pc:chgInfo xmlns:a="http://schemas.openxmlformats.org/drawingml/2006/main" xmlns:r="http://schemas.openxmlformats.org/officeDocument/2006/relationships" xmlns:ac="http://schemas.microsoft.com/office/drawing/2013/main/command" xmlns:pc="http://schemas.microsoft.com/office/powerpoint/2013/main/command">
+  <pc:docChgLst>
+    <pc:chgData name="bhoomikarakesh4007@gmail.com" userId="3e1d30a694679d6a" providerId="LiveId" clId="{92AE630F-9A08-4B72-AC39-653CD381FF50}"/>
+    <pc:docChg chg="undo custSel addSld modSld sldOrd">
+      <pc:chgData name="bhoomikarakesh4007@gmail.com" userId="3e1d30a694679d6a" providerId="LiveId" clId="{92AE630F-9A08-4B72-AC39-653CD381FF50}" dt="2026-08-07T18:21:05.358" v="189"/>
+      <pc:docMkLst>
+        <pc:docMk/>
+      </pc:docMkLst>
+      <pc:sldChg chg="modSp mod">
+        <pc:chgData name="bhoomikarakesh4007@gmail.com" userId="3e1d30a694679d6a" providerId="LiveId" clId="{92AE630F-9A08-4B72-AC39-653CD381FF50}" dt="2026-08-07T18:21:05.358" v="189"/>
+        <pc:sldMkLst>
+          <pc:docMk/>
+          <pc:sldMk cId="3090239800" sldId="483"/>
+        </pc:sldMkLst>
+        <pc:spChg chg="mod">
+          <ac:chgData name="bhoomikarakesh4007@gmail.com" userId="3e1d30a694679d6a" providerId="LiveId" clId="{92AE630F-9A08-4B72-AC39-653CD381FF50}" dt="2026-08-07T18:21:05.358" v="189"/>
+          <ac:spMkLst>
+            <pc:docMk/>
+            <pc:sldMk cId="3090239800" sldId="483"/>
+            <ac:spMk id="9" creationId="{00000000-0000-0000-0000-000000000000}"/>
+          </ac:spMkLst>
+        </pc:spChg>
+      </pc:sldChg>
+      <pc:sldChg chg="addSp modSp add mod ord">
+        <pc:chgData name="bhoomikarakesh4007@gmail.com" userId="3e1d30a694679d6a" providerId="LiveId" clId="{92AE630F-9A08-4B72-AC39-653CD381FF50}" dt="2026-08-07T18:09:12.502" v="173" actId="1076"/>
+        <pc:sldMkLst>
+          <pc:docMk/>
+          <pc:sldMk cId="3090099289" sldId="491"/>
+        </pc:sldMkLst>
+        <pc:spChg chg="mod">
+          <ac:chgData name="bhoomikarakesh4007@gmail.com" userId="3e1d30a694679d6a" providerId="LiveId" clId="{92AE630F-9A08-4B72-AC39-653CD381FF50}" dt="2026-08-07T17:54:06.383" v="56" actId="20577"/>
+          <ac:spMkLst>
+            <pc:docMk/>
+            <pc:sldMk cId="3090099289" sldId="491"/>
+            <ac:spMk id="3" creationId="{6FC9256A-18A7-5E0A-605B-E212D354F5FF}"/>
+          </ac:spMkLst>
+        </pc:spChg>
+        <pc:picChg chg="add mod">
+          <ac:chgData name="bhoomikarakesh4007@gmail.com" userId="3e1d30a694679d6a" providerId="LiveId" clId="{92AE630F-9A08-4B72-AC39-653CD381FF50}" dt="2026-08-07T18:09:10.192" v="172" actId="1076"/>
+          <ac:picMkLst>
+            <pc:docMk/>
+            <pc:sldMk cId="3090099289" sldId="491"/>
+            <ac:picMk id="6" creationId="{750EC296-1C3D-8628-D278-B361D7206104}"/>
+          </ac:picMkLst>
+        </pc:picChg>
+        <pc:picChg chg="add mod">
+          <ac:chgData name="bhoomikarakesh4007@gmail.com" userId="3e1d30a694679d6a" providerId="LiveId" clId="{92AE630F-9A08-4B72-AC39-653CD381FF50}" dt="2026-08-07T18:09:12.502" v="173" actId="1076"/>
+          <ac:picMkLst>
+            <pc:docMk/>
+            <pc:sldMk cId="3090099289" sldId="491"/>
+            <ac:picMk id="8" creationId="{368823A6-07AB-5209-7EC5-FB88898D1243}"/>
+          </ac:picMkLst>
+        </pc:picChg>
+      </pc:sldChg>
+      <pc:sldChg chg="addSp modSp add mod">
+        <pc:chgData name="bhoomikarakesh4007@gmail.com" userId="3e1d30a694679d6a" providerId="LiveId" clId="{92AE630F-9A08-4B72-AC39-653CD381FF50}" dt="2026-08-07T18:02:55.470" v="156" actId="14100"/>
+        <pc:sldMkLst>
+          <pc:docMk/>
+          <pc:sldMk cId="269992411" sldId="492"/>
+        </pc:sldMkLst>
+        <pc:spChg chg="mod">
+          <ac:chgData name="bhoomikarakesh4007@gmail.com" userId="3e1d30a694679d6a" providerId="LiveId" clId="{92AE630F-9A08-4B72-AC39-653CD381FF50}" dt="2026-08-07T17:54:53.427" v="132" actId="5793"/>
+          <ac:spMkLst>
+            <pc:docMk/>
+            <pc:sldMk cId="269992411" sldId="492"/>
+            <ac:spMk id="3" creationId="{D2F196A2-4323-6A52-BBB4-E1AE48716A25}"/>
+          </ac:spMkLst>
+        </pc:spChg>
+        <pc:picChg chg="add mod">
+          <ac:chgData name="bhoomikarakesh4007@gmail.com" userId="3e1d30a694679d6a" providerId="LiveId" clId="{92AE630F-9A08-4B72-AC39-653CD381FF50}" dt="2026-08-07T18:02:36.873" v="153" actId="14100"/>
+          <ac:picMkLst>
+            <pc:docMk/>
+            <pc:sldMk cId="269992411" sldId="492"/>
+            <ac:picMk id="6" creationId="{BD85B8BF-575F-2B17-31B0-BDC1675F0742}"/>
+          </ac:picMkLst>
+        </pc:picChg>
+        <pc:picChg chg="add mod">
+          <ac:chgData name="bhoomikarakesh4007@gmail.com" userId="3e1d30a694679d6a" providerId="LiveId" clId="{92AE630F-9A08-4B72-AC39-653CD381FF50}" dt="2026-08-07T18:02:55.470" v="156" actId="14100"/>
+          <ac:picMkLst>
+            <pc:docMk/>
+            <pc:sldMk cId="269992411" sldId="492"/>
+            <ac:picMk id="8" creationId="{677C011C-C86F-9268-169F-E1F75D6EEB95}"/>
+          </ac:picMkLst>
+        </pc:picChg>
+      </pc:sldChg>
+    </pc:docChg>
+  </pc:docChgLst>
+</pc:chgInfo>
 </file>
 
 <file path=ppt/notesMasters/notesMaster1.xml><?xml version="1.0" encoding="utf-8"?>
@@ -5071,7 +5164,7 @@
         </p:nvSpPr>
         <p:spPr>
           <a:xfrm>
-            <a:off x="838200" y="130629"/>
+            <a:off x="1074491" y="427796"/>
             <a:ext cx="10515600" cy="1560060"/>
           </a:xfrm>
           <a:prstGeom prst="rect">
@@ -5378,7 +5471,7 @@
               <a:t> </a:t>
             </a:r>
             <a:br>
-              <a:rPr lang="en-US" sz="2400" dirty="0">
+              <a:rPr lang="en-US" sz="2400">
                 <a:solidFill>
                   <a:srgbClr val="0070C0"/>
                 </a:solidFill>
@@ -5388,15 +5481,12 @@
               </a:rPr>
             </a:br>
             <a:r>
-              <a:rPr lang="en-US" sz="2400" dirty="0">
+              <a:rPr lang="en-US" sz="2400">
                 <a:solidFill>
                   <a:srgbClr val="0070C0"/>
                 </a:solidFill>
-                <a:latin typeface="Times New Roman" panose="02020603050405020304" pitchFamily="18" charset="0"/>
-                <a:ea typeface="Tahoma" pitchFamily="34" charset="0"/>
-                <a:cs typeface="Times New Roman" panose="02020603050405020304" pitchFamily="18" charset="0"/>
               </a:rPr>
-              <a:t>TITLE OF THE INTERNSHIP</a:t>
+              <a:t>Travio – AI-Powered Smart Travel Planner</a:t>
             </a:r>
             <a:br>
               <a:rPr lang="en-US" sz="2400" dirty="0">
@@ -5844,7 +5934,13 @@
   <p:cSld>
     <p:spTree>
       <p:nvGrpSpPr>
-        <p:cNvPr id="1" name=""/>
+        <p:cNvPr id="1" name="">
+          <a:extLst>
+            <a:ext uri="{FF2B5EF4-FFF2-40B4-BE49-F238E27FC236}">
+              <a16:creationId xmlns:a16="http://schemas.microsoft.com/office/drawing/2014/main" id="{CBB2792F-8FA1-9A04-27F3-F2A98FECFCBC}"/>
+            </a:ext>
+          </a:extLst>
+        </p:cNvPr>
         <p:cNvGrpSpPr/>
         <p:nvPr/>
       </p:nvGrpSpPr>
@@ -5858,7 +5954,13 @@
       </p:grpSpPr>
       <p:sp>
         <p:nvSpPr>
-          <p:cNvPr id="2" name="Title 1"/>
+          <p:cNvPr id="2" name="Title 1">
+            <a:extLst>
+              <a:ext uri="{FF2B5EF4-FFF2-40B4-BE49-F238E27FC236}">
+                <a16:creationId xmlns:a16="http://schemas.microsoft.com/office/drawing/2014/main" id="{5DF7044B-A183-19F4-F02A-58A038028C37}"/>
+              </a:ext>
+            </a:extLst>
+          </p:cNvPr>
           <p:cNvSpPr>
             <a:spLocks noGrp="1"/>
           </p:cNvSpPr>
@@ -5868,7 +5970,7 @@
         </p:nvSpPr>
         <p:spPr>
           <a:xfrm>
-            <a:off x="932146" y="216038"/>
+            <a:off x="838200" y="365125"/>
             <a:ext cx="10515600" cy="596311"/>
           </a:xfrm>
         </p:spPr>
@@ -5884,14 +5986,20 @@
                 <a:latin typeface="Times New Roman" panose="02020603050405020304" pitchFamily="18" charset="0"/>
                 <a:cs typeface="Times New Roman" panose="02020603050405020304" pitchFamily="18" charset="0"/>
               </a:rPr>
-              <a:t>Conclusion</a:t>
-            </a:r>
-          </a:p>
-        </p:txBody>
-      </p:sp>
-      <p:sp>
-        <p:nvSpPr>
-          <p:cNvPr id="4" name="Slide Number Placeholder 3"/>
+              <a:t>Results (Optional)</a:t>
+            </a:r>
+          </a:p>
+        </p:txBody>
+      </p:sp>
+      <p:sp>
+        <p:nvSpPr>
+          <p:cNvPr id="4" name="Slide Number Placeholder 3">
+            <a:extLst>
+              <a:ext uri="{FF2B5EF4-FFF2-40B4-BE49-F238E27FC236}">
+                <a16:creationId xmlns:a16="http://schemas.microsoft.com/office/drawing/2014/main" id="{B8DBE63D-4602-4F26-6844-2C9EB6DB7C69}"/>
+              </a:ext>
+            </a:extLst>
+          </p:cNvPr>
           <p:cNvSpPr>
             <a:spLocks noGrp="1"/>
           </p:cNvSpPr>
@@ -5920,7 +6028,13 @@
       </p:sp>
       <p:sp>
         <p:nvSpPr>
-          <p:cNvPr id="3" name="Content Placeholder 2"/>
+          <p:cNvPr id="3" name="Content Placeholder 2">
+            <a:extLst>
+              <a:ext uri="{FF2B5EF4-FFF2-40B4-BE49-F238E27FC236}">
+                <a16:creationId xmlns:a16="http://schemas.microsoft.com/office/drawing/2014/main" id="{D2F196A2-4323-6A52-BBB4-E1AE48716A25}"/>
+              </a:ext>
+            </a:extLst>
+          </p:cNvPr>
           <p:cNvSpPr>
             <a:spLocks noGrp="1"/>
           </p:cNvSpPr>
@@ -5930,72 +6044,17 @@
         </p:nvSpPr>
         <p:spPr>
           <a:xfrm>
-            <a:off x="164700" y="1060827"/>
-            <a:ext cx="12027300" cy="4351338"/>
+            <a:off x="327038" y="1253331"/>
+            <a:ext cx="10515600" cy="4351338"/>
           </a:xfrm>
         </p:spPr>
         <p:txBody>
           <a:bodyPr/>
           <a:lstStyle/>
           <a:p>
-            <a:pPr lvl="0"/>
-            <a:r>
-              <a:rPr lang="en-US" dirty="0"/>
-              <a:t>Developed an AI-powered smart travel planning application. </a:t>
-            </a:r>
-          </a:p>
-          <a:p>
-            <a:pPr lvl="0"/>
-            <a:r>
-              <a:rPr lang="en-US" dirty="0"/>
-              <a:t>Integrated React, Node.js, Firebase, and Gemini AI. </a:t>
-            </a:r>
-          </a:p>
-          <a:p>
-            <a:pPr lvl="0"/>
-            <a:r>
-              <a:rPr lang="en-US" dirty="0"/>
-              <a:t>Implemented dynamic search and personalized recommendations. </a:t>
-            </a:r>
-          </a:p>
-          <a:p>
-            <a:pPr lvl="0"/>
-            <a:r>
-              <a:rPr lang="en-US" dirty="0"/>
-              <a:t>Combined travel services into a single platform. </a:t>
-            </a:r>
-          </a:p>
-          <a:p>
-            <a:pPr lvl="0"/>
-            <a:r>
-              <a:rPr lang="en-US" dirty="0"/>
-              <a:t>Followed a modular and scalable architecture. </a:t>
-            </a:r>
-          </a:p>
-          <a:p>
-            <a:pPr lvl="0"/>
-            <a:r>
-              <a:rPr lang="en-US" dirty="0"/>
-              <a:t>Gained practical experience in full-stack development and AI integration.</a:t>
-            </a:r>
-          </a:p>
-          <a:p>
-            <a:pPr lvl="0"/>
-            <a:r>
-              <a:rPr lang="en-US" dirty="0"/>
-              <a:t>Improved problem-solving through debugging and continuous testing. </a:t>
-            </a:r>
-          </a:p>
-          <a:p>
-            <a:pPr lvl="0"/>
-            <a:r>
-              <a:rPr lang="en-US" dirty="0"/>
-              <a:t>Designed a responsive interface for a consistent user experience across devices</a:t>
-            </a:r>
-            <a:r>
-              <a:rPr lang="en-US" b="1" dirty="0"/>
-              <a:t>.</a:t>
-            </a:r>
+            <a:pPr marL="0" lvl="0" indent="0">
+              <a:buNone/>
+            </a:pPr>
             <a:endParaRPr lang="en-US" dirty="0"/>
           </a:p>
           <a:p>
@@ -6003,10 +6062,70 @@
           </a:p>
         </p:txBody>
       </p:sp>
+      <p:pic>
+        <p:nvPicPr>
+          <p:cNvPr id="6" name="Picture 5">
+            <a:extLst>
+              <a:ext uri="{FF2B5EF4-FFF2-40B4-BE49-F238E27FC236}">
+                <a16:creationId xmlns:a16="http://schemas.microsoft.com/office/drawing/2014/main" id="{BD85B8BF-575F-2B17-31B0-BDC1675F0742}"/>
+              </a:ext>
+            </a:extLst>
+          </p:cNvPr>
+          <p:cNvPicPr>
+            <a:picLocks noChangeAspect="1"/>
+          </p:cNvPicPr>
+          <p:nvPr/>
+        </p:nvPicPr>
+        <p:blipFill>
+          <a:blip r:embed="rId2"/>
+          <a:stretch>
+            <a:fillRect/>
+          </a:stretch>
+        </p:blipFill>
+        <p:spPr>
+          <a:xfrm>
+            <a:off x="207314" y="1123123"/>
+            <a:ext cx="5567322" cy="3766930"/>
+          </a:xfrm>
+          <a:prstGeom prst="rect">
+            <a:avLst/>
+          </a:prstGeom>
+        </p:spPr>
+      </p:pic>
+      <p:pic>
+        <p:nvPicPr>
+          <p:cNvPr id="8" name="Picture 7">
+            <a:extLst>
+              <a:ext uri="{FF2B5EF4-FFF2-40B4-BE49-F238E27FC236}">
+                <a16:creationId xmlns:a16="http://schemas.microsoft.com/office/drawing/2014/main" id="{677C011C-C86F-9268-169F-E1F75D6EEB95}"/>
+              </a:ext>
+            </a:extLst>
+          </p:cNvPr>
+          <p:cNvPicPr>
+            <a:picLocks noChangeAspect="1"/>
+          </p:cNvPicPr>
+          <p:nvPr/>
+        </p:nvPicPr>
+        <p:blipFill>
+          <a:blip r:embed="rId3"/>
+          <a:stretch>
+            <a:fillRect/>
+          </a:stretch>
+        </p:blipFill>
+        <p:spPr>
+          <a:xfrm>
+            <a:off x="6060965" y="1123124"/>
+            <a:ext cx="5923721" cy="3985090"/>
+          </a:xfrm>
+          <a:prstGeom prst="rect">
+            <a:avLst/>
+          </a:prstGeom>
+        </p:spPr>
+      </p:pic>
     </p:spTree>
     <p:extLst>
       <p:ext uri="{BB962C8B-B14F-4D97-AF65-F5344CB8AC3E}">
-        <p14:creationId xmlns:p14="http://schemas.microsoft.com/office/powerpoint/2010/main" val="3437392139"/>
+        <p14:creationId xmlns:p14="http://schemas.microsoft.com/office/powerpoint/2010/main" val="269992411"/>
       </p:ext>
     </p:extLst>
   </p:cSld>
@@ -6024,6 +6143,218 @@
   <p:cSld>
     <p:spTree>
       <p:nvGrpSpPr>
+        <p:cNvPr id="1" name="">
+          <a:extLst>
+            <a:ext uri="{FF2B5EF4-FFF2-40B4-BE49-F238E27FC236}">
+              <a16:creationId xmlns:a16="http://schemas.microsoft.com/office/drawing/2014/main" id="{EC35133C-54E2-AB52-B0B5-1784D5ECDF7E}"/>
+            </a:ext>
+          </a:extLst>
+        </p:cNvPr>
+        <p:cNvGrpSpPr/>
+        <p:nvPr/>
+      </p:nvGrpSpPr>
+      <p:grpSpPr>
+        <a:xfrm>
+          <a:off x="0" y="0"/>
+          <a:ext cx="0" cy="0"/>
+          <a:chOff x="0" y="0"/>
+          <a:chExt cx="0" cy="0"/>
+        </a:xfrm>
+      </p:grpSpPr>
+      <p:sp>
+        <p:nvSpPr>
+          <p:cNvPr id="2" name="Title 1">
+            <a:extLst>
+              <a:ext uri="{FF2B5EF4-FFF2-40B4-BE49-F238E27FC236}">
+                <a16:creationId xmlns:a16="http://schemas.microsoft.com/office/drawing/2014/main" id="{EF1517F6-02EB-D815-9CA3-2AF8E58EAF62}"/>
+              </a:ext>
+            </a:extLst>
+          </p:cNvPr>
+          <p:cNvSpPr>
+            <a:spLocks noGrp="1"/>
+          </p:cNvSpPr>
+          <p:nvPr>
+            <p:ph type="title"/>
+          </p:nvPr>
+        </p:nvSpPr>
+        <p:spPr>
+          <a:xfrm>
+            <a:off x="838200" y="365125"/>
+            <a:ext cx="10515600" cy="596311"/>
+          </a:xfrm>
+        </p:spPr>
+        <p:txBody>
+          <a:bodyPr/>
+          <a:lstStyle/>
+          <a:p>
+            <a:r>
+              <a:rPr lang="en-US" sz="3200" b="1" dirty="0">
+                <a:solidFill>
+                  <a:srgbClr val="0070C0"/>
+                </a:solidFill>
+                <a:latin typeface="Times New Roman" panose="02020603050405020304" pitchFamily="18" charset="0"/>
+                <a:cs typeface="Times New Roman" panose="02020603050405020304" pitchFamily="18" charset="0"/>
+              </a:rPr>
+              <a:t>Results (Optional)</a:t>
+            </a:r>
+          </a:p>
+        </p:txBody>
+      </p:sp>
+      <p:sp>
+        <p:nvSpPr>
+          <p:cNvPr id="4" name="Slide Number Placeholder 3">
+            <a:extLst>
+              <a:ext uri="{FF2B5EF4-FFF2-40B4-BE49-F238E27FC236}">
+                <a16:creationId xmlns:a16="http://schemas.microsoft.com/office/drawing/2014/main" id="{891D7F47-F911-96E5-A61E-A2BF51499232}"/>
+              </a:ext>
+            </a:extLst>
+          </p:cNvPr>
+          <p:cNvSpPr>
+            <a:spLocks noGrp="1"/>
+          </p:cNvSpPr>
+          <p:nvPr>
+            <p:ph type="sldNum" sz="quarter" idx="12"/>
+          </p:nvPr>
+        </p:nvSpPr>
+        <p:spPr/>
+        <p:txBody>
+          <a:bodyPr/>
+          <a:lstStyle/>
+          <a:p>
+            <a:pPr>
+              <a:defRPr/>
+            </a:pPr>
+            <a:fld id="{815EC703-C051-410C-8BA1-62752E291E83}" type="slidenum">
+              <a:rPr lang="en-US" altLang="en-US" smtClean="0"/>
+              <a:pPr>
+                <a:defRPr/>
+              </a:pPr>
+              <a:t>12</a:t>
+            </a:fld>
+            <a:endParaRPr lang="en-US" altLang="en-US"/>
+          </a:p>
+        </p:txBody>
+      </p:sp>
+      <p:sp>
+        <p:nvSpPr>
+          <p:cNvPr id="3" name="Content Placeholder 2">
+            <a:extLst>
+              <a:ext uri="{FF2B5EF4-FFF2-40B4-BE49-F238E27FC236}">
+                <a16:creationId xmlns:a16="http://schemas.microsoft.com/office/drawing/2014/main" id="{6FC9256A-18A7-5E0A-605B-E212D354F5FF}"/>
+              </a:ext>
+            </a:extLst>
+          </p:cNvPr>
+          <p:cNvSpPr>
+            <a:spLocks noGrp="1"/>
+          </p:cNvSpPr>
+          <p:nvPr>
+            <p:ph idx="1"/>
+          </p:nvPr>
+        </p:nvSpPr>
+        <p:spPr>
+          <a:xfrm>
+            <a:off x="327038" y="1253331"/>
+            <a:ext cx="10515600" cy="4351338"/>
+          </a:xfrm>
+        </p:spPr>
+        <p:txBody>
+          <a:bodyPr/>
+          <a:lstStyle/>
+          <a:p>
+            <a:pPr marL="0" lvl="0" indent="0">
+              <a:buNone/>
+            </a:pPr>
+            <a:endParaRPr lang="en-US" dirty="0"/>
+          </a:p>
+          <a:p>
+            <a:endParaRPr lang="en-US" dirty="0"/>
+          </a:p>
+          <a:p>
+            <a:endParaRPr lang="en-US" dirty="0"/>
+          </a:p>
+        </p:txBody>
+      </p:sp>
+      <p:pic>
+        <p:nvPicPr>
+          <p:cNvPr id="6" name="Picture 5">
+            <a:extLst>
+              <a:ext uri="{FF2B5EF4-FFF2-40B4-BE49-F238E27FC236}">
+                <a16:creationId xmlns:a16="http://schemas.microsoft.com/office/drawing/2014/main" id="{750EC296-1C3D-8628-D278-B361D7206104}"/>
+              </a:ext>
+            </a:extLst>
+          </p:cNvPr>
+          <p:cNvPicPr>
+            <a:picLocks noChangeAspect="1"/>
+          </p:cNvPicPr>
+          <p:nvPr/>
+        </p:nvPicPr>
+        <p:blipFill>
+          <a:blip r:embed="rId2"/>
+          <a:stretch>
+            <a:fillRect/>
+          </a:stretch>
+        </p:blipFill>
+        <p:spPr>
+          <a:xfrm>
+            <a:off x="327038" y="1432236"/>
+            <a:ext cx="5088835" cy="3291223"/>
+          </a:xfrm>
+          <a:prstGeom prst="rect">
+            <a:avLst/>
+          </a:prstGeom>
+        </p:spPr>
+      </p:pic>
+      <p:pic>
+        <p:nvPicPr>
+          <p:cNvPr id="8" name="Picture 7">
+            <a:extLst>
+              <a:ext uri="{FF2B5EF4-FFF2-40B4-BE49-F238E27FC236}">
+                <a16:creationId xmlns:a16="http://schemas.microsoft.com/office/drawing/2014/main" id="{368823A6-07AB-5209-7EC5-FB88898D1243}"/>
+              </a:ext>
+            </a:extLst>
+          </p:cNvPr>
+          <p:cNvPicPr>
+            <a:picLocks noChangeAspect="1"/>
+          </p:cNvPicPr>
+          <p:nvPr/>
+        </p:nvPicPr>
+        <p:blipFill>
+          <a:blip r:embed="rId3"/>
+          <a:stretch>
+            <a:fillRect/>
+          </a:stretch>
+        </p:blipFill>
+        <p:spPr>
+          <a:xfrm>
+            <a:off x="6214365" y="1432235"/>
+            <a:ext cx="5811983" cy="3291223"/>
+          </a:xfrm>
+          <a:prstGeom prst="rect">
+            <a:avLst/>
+          </a:prstGeom>
+        </p:spPr>
+      </p:pic>
+    </p:spTree>
+    <p:extLst>
+      <p:ext uri="{BB962C8B-B14F-4D97-AF65-F5344CB8AC3E}">
+        <p14:creationId xmlns:p14="http://schemas.microsoft.com/office/powerpoint/2010/main" val="3090099289"/>
+      </p:ext>
+    </p:extLst>
+  </p:cSld>
+  <p:clrMapOvr>
+    <a:masterClrMapping/>
+  </p:clrMapOvr>
+  <p:transition spd="slow">
+    <p:blinds dir="vert"/>
+  </p:transition>
+</p:sld>
+</file>
+
+<file path=ppt/slides/slide13.xml><?xml version="1.0" encoding="utf-8"?>
+<p:sld xmlns:a="http://schemas.openxmlformats.org/drawingml/2006/main" xmlns:r="http://schemas.openxmlformats.org/officeDocument/2006/relationships" xmlns:p="http://schemas.openxmlformats.org/presentationml/2006/main">
+  <p:cSld>
+    <p:spTree>
+      <p:nvGrpSpPr>
         <p:cNvPr id="1" name=""/>
         <p:cNvGrpSpPr/>
         <p:nvPr/>
@@ -6038,6 +6369,186 @@
       </p:grpSpPr>
       <p:sp>
         <p:nvSpPr>
+          <p:cNvPr id="2" name="Title 1"/>
+          <p:cNvSpPr>
+            <a:spLocks noGrp="1"/>
+          </p:cNvSpPr>
+          <p:nvPr>
+            <p:ph type="title"/>
+          </p:nvPr>
+        </p:nvSpPr>
+        <p:spPr>
+          <a:xfrm>
+            <a:off x="932146" y="216038"/>
+            <a:ext cx="10515600" cy="596311"/>
+          </a:xfrm>
+        </p:spPr>
+        <p:txBody>
+          <a:bodyPr/>
+          <a:lstStyle/>
+          <a:p>
+            <a:r>
+              <a:rPr lang="en-US" sz="3200" b="1" dirty="0">
+                <a:solidFill>
+                  <a:srgbClr val="0070C0"/>
+                </a:solidFill>
+                <a:latin typeface="Times New Roman" panose="02020603050405020304" pitchFamily="18" charset="0"/>
+                <a:cs typeface="Times New Roman" panose="02020603050405020304" pitchFamily="18" charset="0"/>
+              </a:rPr>
+              <a:t>Conclusion</a:t>
+            </a:r>
+          </a:p>
+        </p:txBody>
+      </p:sp>
+      <p:sp>
+        <p:nvSpPr>
+          <p:cNvPr id="4" name="Slide Number Placeholder 3"/>
+          <p:cNvSpPr>
+            <a:spLocks noGrp="1"/>
+          </p:cNvSpPr>
+          <p:nvPr>
+            <p:ph type="sldNum" sz="quarter" idx="12"/>
+          </p:nvPr>
+        </p:nvSpPr>
+        <p:spPr/>
+        <p:txBody>
+          <a:bodyPr/>
+          <a:lstStyle/>
+          <a:p>
+            <a:pPr>
+              <a:defRPr/>
+            </a:pPr>
+            <a:fld id="{815EC703-C051-410C-8BA1-62752E291E83}" type="slidenum">
+              <a:rPr lang="en-US" altLang="en-US" smtClean="0"/>
+              <a:pPr>
+                <a:defRPr/>
+              </a:pPr>
+              <a:t>13</a:t>
+            </a:fld>
+            <a:endParaRPr lang="en-US" altLang="en-US"/>
+          </a:p>
+        </p:txBody>
+      </p:sp>
+      <p:sp>
+        <p:nvSpPr>
+          <p:cNvPr id="3" name="Content Placeholder 2"/>
+          <p:cNvSpPr>
+            <a:spLocks noGrp="1"/>
+          </p:cNvSpPr>
+          <p:nvPr>
+            <p:ph idx="1"/>
+          </p:nvPr>
+        </p:nvSpPr>
+        <p:spPr>
+          <a:xfrm>
+            <a:off x="164700" y="1060827"/>
+            <a:ext cx="12027300" cy="4351338"/>
+          </a:xfrm>
+        </p:spPr>
+        <p:txBody>
+          <a:bodyPr/>
+          <a:lstStyle/>
+          <a:p>
+            <a:pPr lvl="0"/>
+            <a:r>
+              <a:rPr lang="en-US" dirty="0"/>
+              <a:t>Developed an AI-powered smart travel planning application. </a:t>
+            </a:r>
+          </a:p>
+          <a:p>
+            <a:pPr lvl="0"/>
+            <a:r>
+              <a:rPr lang="en-US" dirty="0"/>
+              <a:t>Integrated React, Node.js, Firebase, and Gemini AI. </a:t>
+            </a:r>
+          </a:p>
+          <a:p>
+            <a:pPr lvl="0"/>
+            <a:r>
+              <a:rPr lang="en-US" dirty="0"/>
+              <a:t>Implemented dynamic search and personalized recommendations. </a:t>
+            </a:r>
+          </a:p>
+          <a:p>
+            <a:pPr lvl="0"/>
+            <a:r>
+              <a:rPr lang="en-US" dirty="0"/>
+              <a:t>Combined travel services into a single platform. </a:t>
+            </a:r>
+          </a:p>
+          <a:p>
+            <a:pPr lvl="0"/>
+            <a:r>
+              <a:rPr lang="en-US" dirty="0"/>
+              <a:t>Followed a modular and scalable architecture. </a:t>
+            </a:r>
+          </a:p>
+          <a:p>
+            <a:pPr lvl="0"/>
+            <a:r>
+              <a:rPr lang="en-US" dirty="0"/>
+              <a:t>Gained practical experience in full-stack development and AI integration.</a:t>
+            </a:r>
+          </a:p>
+          <a:p>
+            <a:pPr lvl="0"/>
+            <a:r>
+              <a:rPr lang="en-US" dirty="0"/>
+              <a:t>Improved problem-solving through debugging and continuous testing. </a:t>
+            </a:r>
+          </a:p>
+          <a:p>
+            <a:pPr lvl="0"/>
+            <a:r>
+              <a:rPr lang="en-US" dirty="0"/>
+              <a:t>Designed a responsive interface for a consistent user experience across devices</a:t>
+            </a:r>
+            <a:r>
+              <a:rPr lang="en-US" b="1" dirty="0"/>
+              <a:t>.</a:t>
+            </a:r>
+            <a:endParaRPr lang="en-US" dirty="0"/>
+          </a:p>
+          <a:p>
+            <a:endParaRPr lang="en-US" dirty="0"/>
+          </a:p>
+        </p:txBody>
+      </p:sp>
+    </p:spTree>
+    <p:extLst>
+      <p:ext uri="{BB962C8B-B14F-4D97-AF65-F5344CB8AC3E}">
+        <p14:creationId xmlns:p14="http://schemas.microsoft.com/office/powerpoint/2010/main" val="3437392139"/>
+      </p:ext>
+    </p:extLst>
+  </p:cSld>
+  <p:clrMapOvr>
+    <a:masterClrMapping/>
+  </p:clrMapOvr>
+  <p:transition spd="slow">
+    <p:blinds dir="vert"/>
+  </p:transition>
+</p:sld>
+</file>
+
+<file path=ppt/slides/slide14.xml><?xml version="1.0" encoding="utf-8"?>
+<p:sld xmlns:a="http://schemas.openxmlformats.org/drawingml/2006/main" xmlns:r="http://schemas.openxmlformats.org/officeDocument/2006/relationships" xmlns:p="http://schemas.openxmlformats.org/presentationml/2006/main">
+  <p:cSld>
+    <p:spTree>
+      <p:nvGrpSpPr>
+        <p:cNvPr id="1" name=""/>
+        <p:cNvGrpSpPr/>
+        <p:nvPr/>
+      </p:nvGrpSpPr>
+      <p:grpSpPr>
+        <a:xfrm>
+          <a:off x="0" y="0"/>
+          <a:ext cx="0" cy="0"/>
+          <a:chOff x="0" y="0"/>
+          <a:chExt cx="0" cy="0"/>
+        </a:xfrm>
+      </p:grpSpPr>
+      <p:sp>
+        <p:nvSpPr>
           <p:cNvPr id="3" name="Content Placeholder 2"/>
           <p:cNvSpPr>
             <a:spLocks noGrp="1"/>
@@ -6140,7 +6651,7 @@
               <a:pPr>
                 <a:defRPr/>
               </a:pPr>
-              <a:t>12</a:t>
+              <a:t>14</a:t>
             </a:fld>
             <a:endParaRPr lang="en-US" altLang="en-US">
               <a:latin typeface="Times New Roman" panose="02020603050405020304" pitchFamily="18" charset="0"/>
@@ -6219,7 +6730,7 @@
 </p:sld>
 </file>
 
-<file path=ppt/slides/slide13.xml><?xml version="1.0" encoding="utf-8"?>
+<file path=ppt/slides/slide15.xml><?xml version="1.0" encoding="utf-8"?>
 <p:sld xmlns:a="http://schemas.openxmlformats.org/drawingml/2006/main" xmlns:r="http://schemas.openxmlformats.org/officeDocument/2006/relationships" xmlns:p="http://schemas.openxmlformats.org/presentationml/2006/main">
   <p:cSld>
     <p:spTree>
@@ -6295,7 +6806,7 @@
               <a:pPr>
                 <a:defRPr/>
               </a:pPr>
-              <a:t>13</a:t>
+              <a:t>15</a:t>
             </a:fld>
             <a:endParaRPr lang="en-US" altLang="en-US"/>
           </a:p>

--- a/TravioDocuments/Ppt.pptx
+++ b/TravioDocuments/Ppt.pptx
@@ -170,99 +170,37 @@
 </p:presentation>
 </file>
 
-<file path=ppt/revisionInfo.xml><?xml version="1.0" encoding="utf-8"?>
-<p1510:revInfo xmlns:a="http://schemas.openxmlformats.org/drawingml/2006/main" xmlns:r="http://schemas.openxmlformats.org/officeDocument/2006/relationships" xmlns:p1510="http://schemas.microsoft.com/office/powerpoint/2015/10/main">
-  <p1510:revLst>
-    <p1510:client id="{A70EA34E-607E-48CC-B13E-2DD79C2049EF}" v="144" dt="2026-08-07T18:20:03.402"/>
-  </p1510:revLst>
-</p1510:revInfo>
-</file>
-
 <file path=ppt/changesInfos/changesInfo1.xml><?xml version="1.0" encoding="utf-8"?>
 <pc:chgInfo xmlns:a="http://schemas.openxmlformats.org/drawingml/2006/main" xmlns:r="http://schemas.openxmlformats.org/officeDocument/2006/relationships" xmlns:ac="http://schemas.microsoft.com/office/drawing/2013/main/command" xmlns:pc="http://schemas.microsoft.com/office/powerpoint/2013/main/command">
   <pc:docChgLst>
     <pc:chgData name="bhoomikarakesh4007@gmail.com" userId="3e1d30a694679d6a" providerId="LiveId" clId="{92AE630F-9A08-4B72-AC39-653CD381FF50}"/>
-    <pc:docChg chg="undo custSel addSld modSld sldOrd">
-      <pc:chgData name="bhoomikarakesh4007@gmail.com" userId="3e1d30a694679d6a" providerId="LiveId" clId="{92AE630F-9A08-4B72-AC39-653CD381FF50}" dt="2026-08-07T18:21:05.358" v="189"/>
+    <pc:docChg chg="undo custSel modSld">
+      <pc:chgData name="bhoomikarakesh4007@gmail.com" userId="3e1d30a694679d6a" providerId="LiveId" clId="{92AE630F-9A08-4B72-AC39-653CD381FF50}" dt="2026-08-16T09:52:49.197" v="23" actId="113"/>
       <pc:docMkLst>
         <pc:docMk/>
       </pc:docMkLst>
       <pc:sldChg chg="modSp mod">
-        <pc:chgData name="bhoomikarakesh4007@gmail.com" userId="3e1d30a694679d6a" providerId="LiveId" clId="{92AE630F-9A08-4B72-AC39-653CD381FF50}" dt="2026-08-07T18:21:05.358" v="189"/>
+        <pc:chgData name="bhoomikarakesh4007@gmail.com" userId="3e1d30a694679d6a" providerId="LiveId" clId="{92AE630F-9A08-4B72-AC39-653CD381FF50}" dt="2026-08-16T09:52:49.197" v="23" actId="113"/>
         <pc:sldMkLst>
           <pc:docMk/>
           <pc:sldMk cId="3090239800" sldId="483"/>
         </pc:sldMkLst>
         <pc:spChg chg="mod">
-          <ac:chgData name="bhoomikarakesh4007@gmail.com" userId="3e1d30a694679d6a" providerId="LiveId" clId="{92AE630F-9A08-4B72-AC39-653CD381FF50}" dt="2026-08-07T18:21:05.358" v="189"/>
+          <ac:chgData name="bhoomikarakesh4007@gmail.com" userId="3e1d30a694679d6a" providerId="LiveId" clId="{92AE630F-9A08-4B72-AC39-653CD381FF50}" dt="2026-08-16T09:46:36.985" v="3" actId="1076"/>
           <ac:spMkLst>
             <pc:docMk/>
             <pc:sldMk cId="3090239800" sldId="483"/>
-            <ac:spMk id="9" creationId="{00000000-0000-0000-0000-000000000000}"/>
+            <ac:spMk id="8" creationId="{00000000-0000-0000-0000-000000000000}"/>
           </ac:spMkLst>
         </pc:spChg>
-      </pc:sldChg>
-      <pc:sldChg chg="addSp modSp add mod ord">
-        <pc:chgData name="bhoomikarakesh4007@gmail.com" userId="3e1d30a694679d6a" providerId="LiveId" clId="{92AE630F-9A08-4B72-AC39-653CD381FF50}" dt="2026-08-07T18:09:12.502" v="173" actId="1076"/>
-        <pc:sldMkLst>
-          <pc:docMk/>
-          <pc:sldMk cId="3090099289" sldId="491"/>
-        </pc:sldMkLst>
         <pc:spChg chg="mod">
-          <ac:chgData name="bhoomikarakesh4007@gmail.com" userId="3e1d30a694679d6a" providerId="LiveId" clId="{92AE630F-9A08-4B72-AC39-653CD381FF50}" dt="2026-08-07T17:54:06.383" v="56" actId="20577"/>
+          <ac:chgData name="bhoomikarakesh4007@gmail.com" userId="3e1d30a694679d6a" providerId="LiveId" clId="{92AE630F-9A08-4B72-AC39-653CD381FF50}" dt="2026-08-16T09:52:49.197" v="23" actId="113"/>
           <ac:spMkLst>
             <pc:docMk/>
-            <pc:sldMk cId="3090099289" sldId="491"/>
-            <ac:spMk id="3" creationId="{6FC9256A-18A7-5E0A-605B-E212D354F5FF}"/>
+            <pc:sldMk cId="3090239800" sldId="483"/>
+            <ac:spMk id="90" creationId="{00000000-0000-0000-0000-000000000000}"/>
           </ac:spMkLst>
         </pc:spChg>
-        <pc:picChg chg="add mod">
-          <ac:chgData name="bhoomikarakesh4007@gmail.com" userId="3e1d30a694679d6a" providerId="LiveId" clId="{92AE630F-9A08-4B72-AC39-653CD381FF50}" dt="2026-08-07T18:09:10.192" v="172" actId="1076"/>
-          <ac:picMkLst>
-            <pc:docMk/>
-            <pc:sldMk cId="3090099289" sldId="491"/>
-            <ac:picMk id="6" creationId="{750EC296-1C3D-8628-D278-B361D7206104}"/>
-          </ac:picMkLst>
-        </pc:picChg>
-        <pc:picChg chg="add mod">
-          <ac:chgData name="bhoomikarakesh4007@gmail.com" userId="3e1d30a694679d6a" providerId="LiveId" clId="{92AE630F-9A08-4B72-AC39-653CD381FF50}" dt="2026-08-07T18:09:12.502" v="173" actId="1076"/>
-          <ac:picMkLst>
-            <pc:docMk/>
-            <pc:sldMk cId="3090099289" sldId="491"/>
-            <ac:picMk id="8" creationId="{368823A6-07AB-5209-7EC5-FB88898D1243}"/>
-          </ac:picMkLst>
-        </pc:picChg>
-      </pc:sldChg>
-      <pc:sldChg chg="addSp modSp add mod">
-        <pc:chgData name="bhoomikarakesh4007@gmail.com" userId="3e1d30a694679d6a" providerId="LiveId" clId="{92AE630F-9A08-4B72-AC39-653CD381FF50}" dt="2026-08-07T18:02:55.470" v="156" actId="14100"/>
-        <pc:sldMkLst>
-          <pc:docMk/>
-          <pc:sldMk cId="269992411" sldId="492"/>
-        </pc:sldMkLst>
-        <pc:spChg chg="mod">
-          <ac:chgData name="bhoomikarakesh4007@gmail.com" userId="3e1d30a694679d6a" providerId="LiveId" clId="{92AE630F-9A08-4B72-AC39-653CD381FF50}" dt="2026-08-07T17:54:53.427" v="132" actId="5793"/>
-          <ac:spMkLst>
-            <pc:docMk/>
-            <pc:sldMk cId="269992411" sldId="492"/>
-            <ac:spMk id="3" creationId="{D2F196A2-4323-6A52-BBB4-E1AE48716A25}"/>
-          </ac:spMkLst>
-        </pc:spChg>
-        <pc:picChg chg="add mod">
-          <ac:chgData name="bhoomikarakesh4007@gmail.com" userId="3e1d30a694679d6a" providerId="LiveId" clId="{92AE630F-9A08-4B72-AC39-653CD381FF50}" dt="2026-08-07T18:02:36.873" v="153" actId="14100"/>
-          <ac:picMkLst>
-            <pc:docMk/>
-            <pc:sldMk cId="269992411" sldId="492"/>
-            <ac:picMk id="6" creationId="{BD85B8BF-575F-2B17-31B0-BDC1675F0742}"/>
-          </ac:picMkLst>
-        </pc:picChg>
-        <pc:picChg chg="add mod">
-          <ac:chgData name="bhoomikarakesh4007@gmail.com" userId="3e1d30a694679d6a" providerId="LiveId" clId="{92AE630F-9A08-4B72-AC39-653CD381FF50}" dt="2026-08-07T18:02:55.470" v="156" actId="14100"/>
-          <ac:picMkLst>
-            <pc:docMk/>
-            <pc:sldMk cId="269992411" sldId="492"/>
-            <ac:picMk id="8" creationId="{677C011C-C86F-9268-169F-E1F75D6EEB95}"/>
-          </ac:picMkLst>
-        </pc:picChg>
       </pc:sldChg>
     </pc:docChg>
   </pc:docChgLst>
@@ -393,7 +331,7 @@
               <a:pPr>
                 <a:defRPr/>
               </a:pPr>
-              <a:t>07-Aug-26</a:t>
+              <a:t>16-Aug-26</a:t>
             </a:fld>
             <a:endParaRPr lang="en-US"/>
           </a:p>
@@ -1102,7 +1040,7 @@
               <a:pPr>
                 <a:defRPr/>
               </a:pPr>
-              <a:t>07-Aug-26</a:t>
+              <a:t>16-Aug-26</a:t>
             </a:fld>
             <a:endParaRPr lang="en-US"/>
           </a:p>
@@ -1320,7 +1258,7 @@
               <a:pPr>
                 <a:defRPr/>
               </a:pPr>
-              <a:t>07-Aug-26</a:t>
+              <a:t>16-Aug-26</a:t>
             </a:fld>
             <a:endParaRPr lang="en-US"/>
           </a:p>
@@ -1548,7 +1486,7 @@
               <a:pPr>
                 <a:defRPr/>
               </a:pPr>
-              <a:t>07-Aug-26</a:t>
+              <a:t>16-Aug-26</a:t>
             </a:fld>
             <a:endParaRPr lang="en-US"/>
           </a:p>
@@ -1766,7 +1704,7 @@
               <a:pPr>
                 <a:defRPr/>
               </a:pPr>
-              <a:t>07-Aug-26</a:t>
+              <a:t>16-Aug-26</a:t>
             </a:fld>
             <a:endParaRPr lang="en-US"/>
           </a:p>
@@ -2060,7 +1998,7 @@
               <a:pPr>
                 <a:defRPr/>
               </a:pPr>
-              <a:t>07-Aug-26</a:t>
+              <a:t>16-Aug-26</a:t>
             </a:fld>
             <a:endParaRPr lang="en-US"/>
           </a:p>
@@ -2340,7 +2278,7 @@
               <a:pPr>
                 <a:defRPr/>
               </a:pPr>
-              <a:t>07-Aug-26</a:t>
+              <a:t>16-Aug-26</a:t>
             </a:fld>
             <a:endParaRPr lang="en-US"/>
           </a:p>
@@ -2755,7 +2693,7 @@
               <a:pPr>
                 <a:defRPr/>
               </a:pPr>
-              <a:t>07-Aug-26</a:t>
+              <a:t>16-Aug-26</a:t>
             </a:fld>
             <a:endParaRPr lang="en-US"/>
           </a:p>
@@ -2921,7 +2859,7 @@
               <a:pPr>
                 <a:defRPr/>
               </a:pPr>
-              <a:t>07-Aug-26</a:t>
+              <a:t>16-Aug-26</a:t>
             </a:fld>
             <a:endParaRPr lang="en-US"/>
           </a:p>
@@ -3064,7 +3002,7 @@
               <a:pPr>
                 <a:defRPr/>
               </a:pPr>
-              <a:t>07-Aug-26</a:t>
+              <a:t>16-Aug-26</a:t>
             </a:fld>
             <a:endParaRPr lang="en-US"/>
           </a:p>
@@ -3389,7 +3327,7 @@
               <a:pPr>
                 <a:defRPr/>
               </a:pPr>
-              <a:t>07-Aug-26</a:t>
+              <a:t>16-Aug-26</a:t>
             </a:fld>
             <a:endParaRPr lang="en-US"/>
           </a:p>
@@ -3697,7 +3635,7 @@
               <a:pPr>
                 <a:defRPr/>
               </a:pPr>
-              <a:t>07-Aug-26</a:t>
+              <a:t>16-Aug-26</a:t>
             </a:fld>
             <a:endParaRPr lang="en-US"/>
           </a:p>
@@ -4018,7 +3956,7 @@
               <a:pPr>
                 <a:defRPr/>
               </a:pPr>
-              <a:t>07-Aug-26</a:t>
+              <a:t>16-Aug-26</a:t>
             </a:fld>
             <a:endParaRPr lang="en-US"/>
           </a:p>
@@ -4666,8 +4604,8 @@
         </p:nvSpPr>
         <p:spPr>
           <a:xfrm>
-            <a:off x="6525369" y="2109718"/>
-            <a:ext cx="5514300" cy="2020560"/>
+            <a:off x="6096000" y="2086588"/>
+            <a:ext cx="6067248" cy="2020560"/>
           </a:xfrm>
           <a:prstGeom prst="rect">
             <a:avLst/>
@@ -4679,7 +4617,7 @@
         </p:spPr>
         <p:txBody>
           <a:bodyPr spcFirstLastPara="1" wrap="square" lIns="91425" tIns="45700" rIns="91425" bIns="45700" anchor="t" anchorCtr="0">
-            <a:normAutofit lnSpcReduction="10000"/>
+            <a:normAutofit fontScale="92500" lnSpcReduction="20000"/>
           </a:bodyPr>
           <a:lstStyle/>
           <a:p>
@@ -4739,31 +4677,6 @@
             </a:endParaRPr>
           </a:p>
           <a:p>
-            <a:pPr marL="0" marR="0" lvl="0" indent="0" algn="ctr" rtl="0">
-              <a:spcBef>
-                <a:spcPts val="400"/>
-              </a:spcBef>
-              <a:spcAft>
-                <a:spcPts val="0"/>
-              </a:spcAft>
-              <a:buClr>
-                <a:srgbClr val="17365D"/>
-              </a:buClr>
-              <a:buSzPts val="2000"/>
-              <a:buFont typeface="Arial"/>
-              <a:buNone/>
-            </a:pPr>
-            <a:endParaRPr sz="2000" b="1" i="0" u="none" strike="noStrike" cap="none" dirty="0">
-              <a:solidFill>
-                <a:srgbClr val="17365D"/>
-              </a:solidFill>
-              <a:latin typeface="Cambria" panose="02040503050406030204" pitchFamily="18" charset="0"/>
-              <a:ea typeface="Cambria" panose="02040503050406030204" pitchFamily="18" charset="0"/>
-              <a:cs typeface="Verdana"/>
-              <a:sym typeface="Verdana"/>
-            </a:endParaRPr>
-          </a:p>
-          <a:p>
             <a:pPr marL="0" marR="0" lvl="0" indent="0" algn="l" rtl="0">
               <a:spcBef>
                 <a:spcPts val="340"/>
@@ -4778,19 +4691,7 @@
               <a:buFont typeface="Arial"/>
               <a:buNone/>
             </a:pPr>
-            <a:r>
-              <a:rPr lang="en-GB" sz="1700" b="1" i="0" u="none" strike="noStrike" cap="none" dirty="0">
-                <a:solidFill>
-                  <a:srgbClr val="17365D"/>
-                </a:solidFill>
-                <a:latin typeface="Cambria" panose="02040503050406030204" pitchFamily="18" charset="0"/>
-                <a:ea typeface="Cambria" panose="02040503050406030204" pitchFamily="18" charset="0"/>
-                <a:cs typeface="Verdana"/>
-                <a:sym typeface="Verdana"/>
-              </a:rPr>
-              <a:t>Dr./Mr./Ms./Prof.</a:t>
-            </a:r>
-            <a:endParaRPr dirty="0">
+            <a:endParaRPr lang="en-IN" dirty="0">
               <a:latin typeface="Cambria" panose="02040503050406030204" pitchFamily="18" charset="0"/>
               <a:ea typeface="Cambria" panose="02040503050406030204" pitchFamily="18" charset="0"/>
             </a:endParaRPr>
@@ -4811,18 +4712,19 @@
               <a:buNone/>
             </a:pPr>
             <a:r>
-              <a:rPr lang="en-GB" sz="1700" b="1" i="0" u="none" strike="noStrike" cap="none" dirty="0">
+              <a:rPr lang="en-IN" b="1" dirty="0">
                 <a:solidFill>
-                  <a:srgbClr val="17365D"/>
+                  <a:srgbClr val="002060"/>
                 </a:solidFill>
                 <a:latin typeface="Cambria" panose="02040503050406030204" pitchFamily="18" charset="0"/>
                 <a:ea typeface="Cambria" panose="02040503050406030204" pitchFamily="18" charset="0"/>
-                <a:cs typeface="Verdana"/>
-                <a:sym typeface="Verdana"/>
               </a:rPr>
-              <a:t>Professor / Associate Professor / Assistant Professor</a:t>
-            </a:r>
-            <a:endParaRPr dirty="0">
+              <a:t>Dr. Jayanthi Kamalasekaran</a:t>
+            </a:r>
+            <a:endParaRPr b="1" dirty="0">
+              <a:solidFill>
+                <a:srgbClr val="002060"/>
+              </a:solidFill>
               <a:latin typeface="Cambria" panose="02040503050406030204" pitchFamily="18" charset="0"/>
               <a:ea typeface="Cambria" panose="02040503050406030204" pitchFamily="18" charset="0"/>
             </a:endParaRPr>
@@ -4843,21 +4745,17 @@
               <a:buNone/>
             </a:pPr>
             <a:r>
-              <a:rPr lang="en-GB" sz="1700" b="1" i="0" u="none" strike="noStrike" cap="none" dirty="0">
+              <a:rPr lang="en-GB" sz="1700" b="1" u="none" strike="noStrike" cap="none" dirty="0">
                 <a:solidFill>
-                  <a:srgbClr val="17365D"/>
+                  <a:srgbClr val="002060"/>
                 </a:solidFill>
                 <a:latin typeface="Cambria" panose="02040503050406030204" pitchFamily="18" charset="0"/>
                 <a:ea typeface="Cambria" panose="02040503050406030204" pitchFamily="18" charset="0"/>
                 <a:cs typeface="Verdana"/>
                 <a:sym typeface="Verdana"/>
               </a:rPr>
-              <a:t>Presidency School of Computer Science and Engineering</a:t>
-            </a:r>
-            <a:endParaRPr dirty="0">
-              <a:latin typeface="Cambria" panose="02040503050406030204" pitchFamily="18" charset="0"/>
-              <a:ea typeface="Cambria" panose="02040503050406030204" pitchFamily="18" charset="0"/>
-            </a:endParaRPr>
+              <a:t>Associate Professor</a:t>
+            </a:r>
           </a:p>
           <a:p>
             <a:pPr marL="0" marR="0" lvl="0" indent="0" algn="l" rtl="0">
@@ -4875,6 +4773,97 @@
               <a:buNone/>
             </a:pPr>
             <a:r>
+              <a:rPr lang="en-IN" b="1" dirty="0">
+                <a:solidFill>
+                  <a:srgbClr val="002060"/>
+                </a:solidFill>
+                <a:latin typeface="Cambria" panose="02040503050406030204" pitchFamily="18" charset="0"/>
+                <a:ea typeface="Cambria" panose="02040503050406030204" pitchFamily="18" charset="0"/>
+              </a:rPr>
+              <a:t>Mr. Mithun H S</a:t>
+            </a:r>
+          </a:p>
+          <a:p>
+            <a:pPr marL="0" marR="0" lvl="0" indent="0" algn="l" rtl="0">
+              <a:spcBef>
+                <a:spcPts val="340"/>
+              </a:spcBef>
+              <a:spcAft>
+                <a:spcPts val="0"/>
+              </a:spcAft>
+              <a:buClr>
+                <a:srgbClr val="17365D"/>
+              </a:buClr>
+              <a:buSzPts val="1700"/>
+              <a:buFont typeface="Arial"/>
+              <a:buNone/>
+            </a:pPr>
+            <a:r>
+              <a:rPr lang="en-IN" b="1" dirty="0">
+                <a:solidFill>
+                  <a:srgbClr val="002060"/>
+                </a:solidFill>
+                <a:latin typeface="Cambria" panose="02040503050406030204" pitchFamily="18" charset="0"/>
+                <a:ea typeface="Cambria" panose="02040503050406030204" pitchFamily="18" charset="0"/>
+              </a:rPr>
+              <a:t>Assistant Professor</a:t>
+            </a:r>
+            <a:endParaRPr b="1" dirty="0">
+              <a:solidFill>
+                <a:srgbClr val="002060"/>
+              </a:solidFill>
+              <a:latin typeface="Cambria" panose="02040503050406030204" pitchFamily="18" charset="0"/>
+              <a:ea typeface="Cambria" panose="02040503050406030204" pitchFamily="18" charset="0"/>
+            </a:endParaRPr>
+          </a:p>
+          <a:p>
+            <a:pPr marL="0" marR="0" lvl="0" indent="0" algn="l" rtl="0">
+              <a:spcBef>
+                <a:spcPts val="340"/>
+              </a:spcBef>
+              <a:spcAft>
+                <a:spcPts val="0"/>
+              </a:spcAft>
+              <a:buClr>
+                <a:srgbClr val="17365D"/>
+              </a:buClr>
+              <a:buSzPts val="1700"/>
+              <a:buFont typeface="Arial"/>
+              <a:buNone/>
+            </a:pPr>
+            <a:r>
+              <a:rPr lang="en-GB" sz="1700" b="1" i="0" u="none" strike="noStrike" cap="none" dirty="0">
+                <a:solidFill>
+                  <a:srgbClr val="17365D"/>
+                </a:solidFill>
+                <a:latin typeface="Cambria" panose="02040503050406030204" pitchFamily="18" charset="0"/>
+                <a:ea typeface="Cambria" panose="02040503050406030204" pitchFamily="18" charset="0"/>
+                <a:cs typeface="Verdana"/>
+                <a:sym typeface="Verdana"/>
+              </a:rPr>
+              <a:t>Presidency School of Computer Science and Engineering</a:t>
+            </a:r>
+            <a:endParaRPr dirty="0">
+              <a:latin typeface="Cambria" panose="02040503050406030204" pitchFamily="18" charset="0"/>
+              <a:ea typeface="Cambria" panose="02040503050406030204" pitchFamily="18" charset="0"/>
+            </a:endParaRPr>
+          </a:p>
+          <a:p>
+            <a:pPr marL="0" marR="0" lvl="0" indent="0" algn="l" rtl="0">
+              <a:spcBef>
+                <a:spcPts val="340"/>
+              </a:spcBef>
+              <a:spcAft>
+                <a:spcPts val="0"/>
+              </a:spcAft>
+              <a:buClr>
+                <a:srgbClr val="17365D"/>
+              </a:buClr>
+              <a:buSzPts val="1700"/>
+              <a:buFont typeface="Arial"/>
+              <a:buNone/>
+            </a:pPr>
+            <a:r>
               <a:rPr lang="en-GB" sz="1700" b="1" i="0" u="none" strike="noStrike" cap="none" dirty="0">
                 <a:solidFill>
                   <a:srgbClr val="17365D"/>
@@ -4926,7 +4915,7 @@
         </p:nvSpPr>
         <p:spPr>
           <a:xfrm>
-            <a:off x="86072" y="4088074"/>
+            <a:off x="182130" y="3974785"/>
             <a:ext cx="12009870" cy="1562100"/>
           </a:xfrm>
           <a:prstGeom prst="rect">
